--- a/videos/machine-learning/03_ridger_regression_gradient_descent/recreated_pptx/slide_016_recreated.pptx
+++ b/videos/machine-learning/03_ridger_regression_gradient_descent/recreated_pptx/slide_016_recreated.pptx
@@ -884,7 +884,7 @@
         <p:spPr>
           <a:xfrm>
             <a:off x="685800" y="571500"/>
-            <a:ext cx="10795000" cy="6286500"/>
+            <a:ext cx="10782300" cy="6286500"/>
           </a:xfrm>
           <a:prstGeom prst="rect">
             <a:avLst/>
@@ -903,19 +903,16 @@
         </p:nvSpPr>
         <p:spPr>
           <a:xfrm>
-            <a:off x="742950" y="584200"/>
-            <a:ext cx="0" cy="6261100"/>
-          </a:xfrm>
-          <a:prstGeom prst="line">
-            <a:avLst/>
-          </a:prstGeom>
-          <a:noFill/>
-          <a:ln w="12700">
-            <a:solidFill>
-              <a:srgbClr val="C00000"/>
-            </a:solidFill>
-            <a:prstDash val="solid"/>
-          </a:ln>
+            <a:off x="742950" y="571500"/>
+            <a:ext cx="12700" cy="6286500"/>
+          </a:xfrm>
+          <a:prstGeom prst="rect">
+            <a:avLst/>
+          </a:prstGeom>
+          <a:solidFill>
+            <a:srgbClr val="C00000"/>
+          </a:solidFill>
+          <a:ln/>
         </p:spPr>
       </p:sp>
       <p:sp>
@@ -926,19 +923,16 @@
         </p:nvSpPr>
         <p:spPr>
           <a:xfrm>
-            <a:off x="11442700" y="584200"/>
-            <a:ext cx="0" cy="6261100"/>
-          </a:xfrm>
-          <a:prstGeom prst="line">
-            <a:avLst/>
-          </a:prstGeom>
-          <a:noFill/>
-          <a:ln w="12700">
-            <a:solidFill>
-              <a:srgbClr val="C00000"/>
-            </a:solidFill>
-            <a:prstDash val="solid"/>
-          </a:ln>
+            <a:off x="11442700" y="571500"/>
+            <a:ext cx="12700" cy="6286500"/>
+          </a:xfrm>
+          <a:prstGeom prst="rect">
+            <a:avLst/>
+          </a:prstGeom>
+          <a:solidFill>
+            <a:srgbClr val="C00000"/>
+          </a:solidFill>
+          <a:ln/>
         </p:spPr>
       </p:sp>
       <p:sp>
@@ -949,19 +943,16 @@
         </p:nvSpPr>
         <p:spPr>
           <a:xfrm>
-            <a:off x="736600" y="6838950"/>
-            <a:ext cx="10718800" cy="0"/>
-          </a:xfrm>
-          <a:prstGeom prst="line">
-            <a:avLst/>
-          </a:prstGeom>
-          <a:noFill/>
-          <a:ln w="12700">
-            <a:solidFill>
-              <a:srgbClr val="C00000"/>
-            </a:solidFill>
-            <a:prstDash val="solid"/>
-          </a:ln>
+            <a:off x="685800" y="6838950"/>
+            <a:ext cx="10782300" cy="12700"/>
+          </a:xfrm>
+          <a:prstGeom prst="rect">
+            <a:avLst/>
+          </a:prstGeom>
+          <a:solidFill>
+            <a:srgbClr val="C00000"/>
+          </a:solidFill>
+          <a:ln/>
         </p:spPr>
       </p:sp>
       <p:sp>
@@ -981,7 +972,7 @@
           <a:solidFill>
             <a:srgbClr val="FDFD96"/>
           </a:solidFill>
-          <a:ln w="25400">
+          <a:ln w="12700">
             <a:solidFill>
               <a:srgbClr val="6A5ACD"/>
             </a:solidFill>
@@ -1317,7 +1308,7 @@
                 <a:ea typeface="Arial" pitchFamily="34" charset="-122"/>
                 <a:cs typeface="Arial" pitchFamily="34" charset="-120"/>
               </a:rPr>
-              <a:t>• This has the effect of better generalization of the model</a:t>
+              <a:t>• This have the effect of better generalization of the model</a:t>
             </a:r>
             <a:endParaRPr lang="en-US" sz="1800" dirty="0"/>
           </a:p>
@@ -1395,7 +1386,7 @@
                 <a:ea typeface="Arial" pitchFamily="34" charset="-122"/>
                 <a:cs typeface="Arial" pitchFamily="34" charset="-120"/>
               </a:rPr>
-              <a:t>generalization, the regularization term is added to the objective loss function with a</a:t>
+              <a:t>generalization, the generalization term is added to the objective loss function with a</a:t>
             </a:r>
             <a:endParaRPr lang="en-US" sz="1800" dirty="0"/>
           </a:p>
